--- a/presentations/b07-pki/B07_PKI.pptx
+++ b/presentations/b07-pki/B07_PKI.pptx
@@ -121,14 +121,14 @@
   <p:extLst>
     <p:ext uri="{521415D9-36F7-43E2-AB2F-B90AF26B5E84}">
       <p14:sectionLst xmlns:p14="http://schemas.microsoft.com/office/powerpoint/2010/main">
-        <p14:section name="Why certificates" id="{b4f4a369-c598-f879-91d2-5b7c79a7599f}">
+        <p14:section name="Why certificates" id="{27b98bb7-7307-b6b3-ce2c-e511294b2da3}">
           <p14:sldIdLst>
             <p14:sldId id="256"/>
             <p14:sldId id="257"/>
             <p14:sldId id="258"/>
           </p14:sldIdLst>
         </p14:section>
-        <p14:section name="What the target is" id="{634ef602-6cf7-a835-98ca-2b0f956bbf52}">
+        <p14:section name="What the target is" id="{65daae17-17f6-8ec9-1d3b-c65df1829296}">
           <p14:sldIdLst>
             <p14:sldId id="259"/>
             <p14:sldId id="260"/>
@@ -136,12 +136,12 @@
             <p14:sldId id="262"/>
           </p14:sldIdLst>
         </p14:section>
-        <p14:section name="Who owns it" id="{83d7a659-48bb-eec2-fb78-ed7d2f883597}">
+        <p14:section name="Who owns it" id="{78618320-4fcb-528c-fdfc-2ac126b501f0}">
           <p14:sldIdLst>
             <p14:sldId id="263"/>
           </p14:sldIdLst>
         </p14:section>
-        <p14:section name="How to do it" id="{181f37f3-5d98-f96b-d47f-49b7705cfb45}">
+        <p14:section name="How to do it" id="{9563314d-1fe3-7d63-c314-bb1dfb5fa55f}">
           <p14:sldIdLst>
             <p14:sldId id="264"/>
             <p14:sldId id="265"/>
@@ -150,7 +150,7 @@
             <p14:sldId id="268"/>
           </p14:sldIdLst>
         </p14:section>
-        <p14:section name="Backup" id="{895d2732-d11d-0c0d-d61e-914d8c279e0b}">
+        <p14:section name="Backup" id="{32532e5e-0660-8094-8b8e-604dc7548bd4}">
           <p14:sldIdLst>
             <p14:sldId id="269"/>
             <p14:sldId id="270"/>
@@ -560,7 +560,7 @@
           <a:p>
             <a:r>
               <a:rPr lang="en-US" dirty="0"/>
-              <a:t>[0:00–0:33]  This briefing comes from Book 07 of the Modernization Workbook, PKI and Certificates: the move from Active Directory Certificate Services to Microsoft Cloud PKI, Entra certificate-based authentication and the Federal PKI.
+              <a:t>[0:00–0:33]  This briefing comes from Book 07 of the Federal Modernization Workbook, PKI and Certificates: the move from Active Directory Certificate Services to Microsoft Cloud PKI, Entra certificate-based authentication and the Federal PKI.
 Every other migration changes which system answers the question "who is this?" Certificates are how that answer gets proved. I'll cover why certificates outlive every migration, what the target PKI is, who owns the certificate estate, and how to move it without stranding a single certificate.
 Workbook: Book 07, index.</a:t>
             </a:r>
@@ -2140,7 +2140,7 @@
                   <a:schemeClr val="accent5"/>
                 </a:solidFill>
               </a:rPr>
-              <a:t>Modernization Workbook  ·  Book 07 PKI &amp; Certificates</a:t>
+              <a:t>Federal Modernization Workbook  ·  Book 07 PKI &amp; Certificates</a:t>
             </a:r>
             <a:endParaRPr lang="en-US" sz="1000" dirty="0"/>
           </a:p>
@@ -2621,7 +2621,90 @@
       </p:sp>
       <p:sp>
         <p:nvSpPr>
-          <p:cNvPr id="4" name="Agenda line"/>
+          <p:cNvPr id="4" name="Presenter"/>
+          <p:cNvSpPr txBox="1"/>
+          <p:nvPr/>
+        </p:nvSpPr>
+        <p:spPr>
+          <a:xfrm>
+            <a:off x="731520" y="5897880"/>
+            <a:ext cx="6858000" cy="365760"/>
+          </a:xfrm>
+          <a:prstGeom prst="rect">
+            <a:avLst/>
+          </a:prstGeom>
+          <a:noFill/>
+          <a:ln/>
+        </p:spPr>
+        <p:txBody>
+          <a:bodyPr wrap="square" lIns="0" tIns="0" rIns="0" bIns="0" rtlCol="0" anchor="ctr"/>
+          <a:lstStyle/>
+          <a:p>
+            <a:pPr indent="0" marL="0">
+              <a:buNone/>
+            </a:pPr>
+            <a:r>
+              <a:rPr lang="en-US" sz="1600" dirty="0">
+                <a:solidFill>
+                  <a:srgbClr val="64748B"/>
+                </a:solidFill>
+              </a:rPr>
+              <a:t>Presented by  </a:t>
+            </a:r>
+            <a:pPr indent="0" marL="0">
+              <a:buNone/>
+            </a:pPr>
+            <a:r>
+              <a:rPr lang="en-US" sz="1600" b="1" dirty="0">
+                <a:solidFill>
+                  <a:srgbClr val="1F2A44"/>
+                </a:solidFill>
+              </a:rPr>
+              <a:t>Michael F. Stratton</a:t>
+            </a:r>
+            <a:endParaRPr lang="en-US" sz="1600" dirty="0"/>
+          </a:p>
+        </p:txBody>
+      </p:sp>
+      <p:sp>
+        <p:nvSpPr>
+          <p:cNvPr id="5" name="Disclaimer"/>
+          <p:cNvSpPr txBox="1"/>
+          <p:nvPr/>
+        </p:nvSpPr>
+        <p:spPr>
+          <a:xfrm>
+            <a:off x="731520" y="6309360"/>
+            <a:ext cx="8686800" cy="274320"/>
+          </a:xfrm>
+          <a:prstGeom prst="rect">
+            <a:avLst/>
+          </a:prstGeom>
+          <a:noFill/>
+          <a:ln/>
+        </p:spPr>
+        <p:txBody>
+          <a:bodyPr wrap="square" lIns="0" tIns="0" rIns="0" bIns="0" rtlCol="0" anchor="ctr"/>
+          <a:lstStyle/>
+          <a:p>
+            <a:pPr indent="0" marL="0">
+              <a:buNone/>
+            </a:pPr>
+            <a:r>
+              <a:rPr lang="en-US" sz="1050" dirty="0">
+                <a:solidFill>
+                  <a:srgbClr val="64748B"/>
+                </a:solidFill>
+              </a:rPr>
+              <a:t>Not an official U.S. government publication. Independent technical analysis; not reviewed or endorsed by any federal agency.</a:t>
+            </a:r>
+            <a:endParaRPr lang="en-US" sz="1050" dirty="0"/>
+          </a:p>
+        </p:txBody>
+      </p:sp>
+      <p:sp>
+        <p:nvSpPr>
+          <p:cNvPr id="6" name="Agenda line"/>
           <p:cNvSpPr txBox="1"/>
           <p:nvPr/>
         </p:nvSpPr>
@@ -2723,7 +2806,7 @@
       </p:sp>
       <p:sp>
         <p:nvSpPr>
-          <p:cNvPr id="5" name="Series line"/>
+          <p:cNvPr id="7" name="Series line"/>
           <p:cNvSpPr txBox="1"/>
           <p:nvPr/>
         </p:nvSpPr>
@@ -2751,7 +2834,7 @@
                   <a:srgbClr val="1F2A44"/>
                 </a:solidFill>
               </a:rPr>
-              <a:t>Modernization Workbook</a:t>
+              <a:t>Federal Modernization Workbook</a:t>
             </a:r>
             <a:endParaRPr lang="en-US" sz="1600" dirty="0"/>
           </a:p>
@@ -2839,7 +2922,13 @@
       </p:sp>
       <p:sp>
         <p:nvSpPr>
-          <p:cNvPr id="3" name="Tag How"/>
+          <p:cNvPr id="3" name="Tag How" descr="">
+            <a:extLst>
+              <a:ext uri="{C183D7F6-B498-43B3-948B-1728B52AA6E4}">
+                <adec:decorative xmlns:adec="http://schemas.microsoft.com/office/drawing/2017/decorative" val="1"/>
+              </a:ext>
+            </a:extLst>
+          </p:cNvPr>
           <p:cNvSpPr/>
           <p:nvPr/>
         </p:nvSpPr>
@@ -2902,7 +2991,13 @@
       </p:sp>
       <p:sp>
         <p:nvSpPr>
-          <p:cNvPr id="5" name="Col 0"/>
+          <p:cNvPr id="5" name="Col 0" descr="">
+            <a:extLst>
+              <a:ext uri="{C183D7F6-B498-43B3-948B-1728B52AA6E4}">
+                <adec:decorative xmlns:adec="http://schemas.microsoft.com/office/drawing/2017/decorative" val="1"/>
+              </a:ext>
+            </a:extLst>
+          </p:cNvPr>
           <p:cNvSpPr/>
           <p:nvPr/>
         </p:nvSpPr>
@@ -2936,7 +3031,13 @@
       </p:sp>
       <p:sp>
         <p:nvSpPr>
-          <p:cNvPr id="6" name="Icon FaShieldHalved"/>
+          <p:cNvPr id="6" name="Icon FaShieldHalved" descr="">
+            <a:extLst>
+              <a:ext uri="{C183D7F6-B498-43B3-948B-1728B52AA6E4}">
+                <adec:decorative xmlns:adec="http://schemas.microsoft.com/office/drawing/2017/decorative" val="1"/>
+              </a:ext>
+            </a:extLst>
+          </p:cNvPr>
           <p:cNvSpPr/>
           <p:nvPr/>
         </p:nvSpPr>
@@ -2961,7 +3062,13 @@
       </p:sp>
       <p:pic>
         <p:nvPicPr>
-          <p:cNvPr id="7" name="Image 0" descr="C:\Users\whale\git\mwb-b07\presentations\_build\icons\FaShieldHalved.png">    </p:cNvPr>
+          <p:cNvPr id="7" name="Image 0" descr="">
+            <a:extLst>
+              <a:ext uri="{C183D7F6-B498-43B3-948B-1728B52AA6E4}">
+                <adec:decorative xmlns:adec="http://schemas.microsoft.com/office/drawing/2017/decorative" val="1"/>
+              </a:ext>
+            </a:extLst>
+          </p:cNvPr>
           <p:cNvPicPr>
             <a:picLocks noChangeAspect="1"/>
           </p:cNvPicPr>
@@ -3118,7 +3225,13 @@
       </p:sp>
       <p:sp>
         <p:nvSpPr>
-          <p:cNvPr id="10" name="Col 1"/>
+          <p:cNvPr id="10" name="Col 1" descr="">
+            <a:extLst>
+              <a:ext uri="{C183D7F6-B498-43B3-948B-1728B52AA6E4}">
+                <adec:decorative xmlns:adec="http://schemas.microsoft.com/office/drawing/2017/decorative" val="1"/>
+              </a:ext>
+            </a:extLst>
+          </p:cNvPr>
           <p:cNvSpPr/>
           <p:nvPr/>
         </p:nvSpPr>
@@ -3152,7 +3265,13 @@
       </p:sp>
       <p:sp>
         <p:nvSpPr>
-          <p:cNvPr id="11" name="Icon FaFingerprint"/>
+          <p:cNvPr id="11" name="Icon FaFingerprint" descr="">
+            <a:extLst>
+              <a:ext uri="{C183D7F6-B498-43B3-948B-1728B52AA6E4}">
+                <adec:decorative xmlns:adec="http://schemas.microsoft.com/office/drawing/2017/decorative" val="1"/>
+              </a:ext>
+            </a:extLst>
+          </p:cNvPr>
           <p:cNvSpPr/>
           <p:nvPr/>
         </p:nvSpPr>
@@ -3177,7 +3296,13 @@
       </p:sp>
       <p:pic>
         <p:nvPicPr>
-          <p:cNvPr id="12" name="Image 1" descr="C:\Users\whale\git\mwb-b07\presentations\_build\icons\FaFingerprint.png">    </p:cNvPr>
+          <p:cNvPr id="12" name="Image 1" descr="">
+            <a:extLst>
+              <a:ext uri="{C183D7F6-B498-43B3-948B-1728B52AA6E4}">
+                <adec:decorative xmlns:adec="http://schemas.microsoft.com/office/drawing/2017/decorative" val="1"/>
+              </a:ext>
+            </a:extLst>
+          </p:cNvPr>
           <p:cNvPicPr>
             <a:picLocks noChangeAspect="1"/>
           </p:cNvPicPr>
@@ -3334,7 +3459,13 @@
       </p:sp>
       <p:sp>
         <p:nvSpPr>
-          <p:cNvPr id="15" name="Affinity"/>
+          <p:cNvPr id="15" name="Affinity" descr="">
+            <a:extLst>
+              <a:ext uri="{C183D7F6-B498-43B3-948B-1728B52AA6E4}">
+                <adec:decorative xmlns:adec="http://schemas.microsoft.com/office/drawing/2017/decorative" val="1"/>
+              </a:ext>
+            </a:extLst>
+          </p:cNvPr>
           <p:cNvSpPr/>
           <p:nvPr/>
         </p:nvSpPr>
@@ -3368,7 +3499,13 @@
       </p:sp>
       <p:sp>
         <p:nvSpPr>
-          <p:cNvPr id="16" name="Icon FaLock"/>
+          <p:cNvPr id="16" name="Icon FaLock" descr="">
+            <a:extLst>
+              <a:ext uri="{C183D7F6-B498-43B3-948B-1728B52AA6E4}">
+                <adec:decorative xmlns:adec="http://schemas.microsoft.com/office/drawing/2017/decorative" val="1"/>
+              </a:ext>
+            </a:extLst>
+          </p:cNvPr>
           <p:cNvSpPr/>
           <p:nvPr/>
         </p:nvSpPr>
@@ -3393,7 +3530,13 @@
       </p:sp>
       <p:pic>
         <p:nvPicPr>
-          <p:cNvPr id="17" name="Image 2" descr="C:\Users\whale\git\mwb-b07\presentations\_build\icons\FaLock.png">    </p:cNvPr>
+          <p:cNvPr id="17" name="Image 2" descr="">
+            <a:extLst>
+              <a:ext uri="{C183D7F6-B498-43B3-948B-1728B52AA6E4}">
+                <adec:decorative xmlns:adec="http://schemas.microsoft.com/office/drawing/2017/decorative" val="1"/>
+              </a:ext>
+            </a:extLst>
+          </p:cNvPr>
           <p:cNvPicPr>
             <a:picLocks noChangeAspect="1"/>
           </p:cNvPicPr>
@@ -3611,7 +3754,13 @@
       </p:sp>
       <p:sp>
         <p:nvSpPr>
-          <p:cNvPr id="3" name="Tag How"/>
+          <p:cNvPr id="3" name="Tag How" descr="">
+            <a:extLst>
+              <a:ext uri="{C183D7F6-B498-43B3-948B-1728B52AA6E4}">
+                <adec:decorative xmlns:adec="http://schemas.microsoft.com/office/drawing/2017/decorative" val="1"/>
+              </a:ext>
+            </a:extLst>
+          </p:cNvPr>
           <p:cNvSpPr/>
           <p:nvPr/>
         </p:nvSpPr>
@@ -3693,7 +3842,7 @@
         <a:graphic>
           <a:graphicData uri="http://schemas.openxmlformats.org/drawingml/2006/table">
             <a:tbl>
-              <a:tblPr/>
+              <a:tblPr firstRow="1" bandRow="1"/>
               <a:tblGrid>
                 <a:gridCol w="2011680"/>
                 <a:gridCol w="1005840"/>
@@ -5147,7 +5296,13 @@
       </p:graphicFrame>
       <p:sp>
         <p:nvSpPr>
-          <p:cNvPr id="6" name="Rules box"/>
+          <p:cNvPr id="6" name="Rules box" descr="">
+            <a:extLst>
+              <a:ext uri="{C183D7F6-B498-43B3-948B-1728B52AA6E4}">
+                <adec:decorative xmlns:adec="http://schemas.microsoft.com/office/drawing/2017/decorative" val="1"/>
+              </a:ext>
+            </a:extLst>
+          </p:cNvPr>
           <p:cNvSpPr/>
           <p:nvPr/>
         </p:nvSpPr>
@@ -5181,7 +5336,13 @@
       </p:sp>
       <p:sp>
         <p:nvSpPr>
-          <p:cNvPr id="7" name="Icon FaRightLeft"/>
+          <p:cNvPr id="7" name="Icon FaRightLeft" descr="">
+            <a:extLst>
+              <a:ext uri="{C183D7F6-B498-43B3-948B-1728B52AA6E4}">
+                <adec:decorative xmlns:adec="http://schemas.microsoft.com/office/drawing/2017/decorative" val="1"/>
+              </a:ext>
+            </a:extLst>
+          </p:cNvPr>
           <p:cNvSpPr/>
           <p:nvPr/>
         </p:nvSpPr>
@@ -5206,7 +5367,13 @@
       </p:sp>
       <p:pic>
         <p:nvPicPr>
-          <p:cNvPr id="8" name="Image 0" descr="C:\Users\whale\git\mwb-b07\presentations\_build\icons\FaRightLeft.png">    </p:cNvPr>
+          <p:cNvPr id="8" name="Image 0" descr="">
+            <a:extLst>
+              <a:ext uri="{C183D7F6-B498-43B3-948B-1728B52AA6E4}">
+                <adec:decorative xmlns:adec="http://schemas.microsoft.com/office/drawing/2017/decorative" val="1"/>
+              </a:ext>
+            </a:extLst>
+          </p:cNvPr>
           <p:cNvPicPr>
             <a:picLocks noChangeAspect="1"/>
           </p:cNvPicPr>
@@ -5345,7 +5512,13 @@
       </p:sp>
       <p:sp>
         <p:nvSpPr>
-          <p:cNvPr id="11" name="Rollback"/>
+          <p:cNvPr id="11" name="Rollback" descr="">
+            <a:extLst>
+              <a:ext uri="{C183D7F6-B498-43B3-948B-1728B52AA6E4}">
+                <adec:decorative xmlns:adec="http://schemas.microsoft.com/office/drawing/2017/decorative" val="1"/>
+              </a:ext>
+            </a:extLst>
+          </p:cNvPr>
           <p:cNvSpPr/>
           <p:nvPr/>
         </p:nvSpPr>
@@ -5379,7 +5552,13 @@
       </p:sp>
       <p:sp>
         <p:nvSpPr>
-          <p:cNvPr id="12" name="Icon FaArrowsRotate"/>
+          <p:cNvPr id="12" name="Icon FaArrowsRotate" descr="">
+            <a:extLst>
+              <a:ext uri="{C183D7F6-B498-43B3-948B-1728B52AA6E4}">
+                <adec:decorative xmlns:adec="http://schemas.microsoft.com/office/drawing/2017/decorative" val="1"/>
+              </a:ext>
+            </a:extLst>
+          </p:cNvPr>
           <p:cNvSpPr/>
           <p:nvPr/>
         </p:nvSpPr>
@@ -5404,7 +5583,13 @@
       </p:sp>
       <p:pic>
         <p:nvPicPr>
-          <p:cNvPr id="13" name="Image 1" descr="C:\Users\whale\git\mwb-b07\presentations\_build\icons\FaArrowsRotate.png">    </p:cNvPr>
+          <p:cNvPr id="13" name="Image 1" descr="">
+            <a:extLst>
+              <a:ext uri="{C183D7F6-B498-43B3-948B-1728B52AA6E4}">
+                <adec:decorative xmlns:adec="http://schemas.microsoft.com/office/drawing/2017/decorative" val="1"/>
+              </a:ext>
+            </a:extLst>
+          </p:cNvPr>
           <p:cNvPicPr>
             <a:picLocks noChangeAspect="1"/>
           </p:cNvPicPr>
@@ -5622,7 +5807,13 @@
       </p:sp>
       <p:sp>
         <p:nvSpPr>
-          <p:cNvPr id="3" name="Tag How"/>
+          <p:cNvPr id="3" name="Tag How" descr="">
+            <a:extLst>
+              <a:ext uri="{C183D7F6-B498-43B3-948B-1728B52AA6E4}">
+                <adec:decorative xmlns:adec="http://schemas.microsoft.com/office/drawing/2017/decorative" val="1"/>
+              </a:ext>
+            </a:extLst>
+          </p:cNvPr>
           <p:cNvSpPr/>
           <p:nvPr/>
         </p:nvSpPr>
@@ -5721,7 +5912,13 @@
       </p:sp>
       <p:sp>
         <p:nvSpPr>
-          <p:cNvPr id="6" name="Icon FaLaptop"/>
+          <p:cNvPr id="6" name="Icon FaLaptop" descr="">
+            <a:extLst>
+              <a:ext uri="{C183D7F6-B498-43B3-948B-1728B52AA6E4}">
+                <adec:decorative xmlns:adec="http://schemas.microsoft.com/office/drawing/2017/decorative" val="1"/>
+              </a:ext>
+            </a:extLst>
+          </p:cNvPr>
           <p:cNvSpPr/>
           <p:nvPr/>
         </p:nvSpPr>
@@ -5746,7 +5943,13 @@
       </p:sp>
       <p:pic>
         <p:nvPicPr>
-          <p:cNvPr id="7" name="Image 0" descr="C:\Users\whale\git\mwb-b07\presentations\_build\icons\FaLaptop.png">    </p:cNvPr>
+          <p:cNvPr id="7" name="Image 0" descr="">
+            <a:extLst>
+              <a:ext uri="{C183D7F6-B498-43B3-948B-1728B52AA6E4}">
+                <adec:decorative xmlns:adec="http://schemas.microsoft.com/office/drawing/2017/decorative" val="1"/>
+              </a:ext>
+            </a:extLst>
+          </p:cNvPr>
           <p:cNvPicPr>
             <a:picLocks noChangeAspect="1"/>
           </p:cNvPicPr>
@@ -5820,7 +6023,13 @@
       </p:sp>
       <p:sp>
         <p:nvSpPr>
-          <p:cNvPr id="9" name="Icon FaServer"/>
+          <p:cNvPr id="9" name="Icon FaServer" descr="">
+            <a:extLst>
+              <a:ext uri="{C183D7F6-B498-43B3-948B-1728B52AA6E4}">
+                <adec:decorative xmlns:adec="http://schemas.microsoft.com/office/drawing/2017/decorative" val="1"/>
+              </a:ext>
+            </a:extLst>
+          </p:cNvPr>
           <p:cNvSpPr/>
           <p:nvPr/>
         </p:nvSpPr>
@@ -5845,7 +6054,13 @@
       </p:sp>
       <p:pic>
         <p:nvPicPr>
-          <p:cNvPr id="10" name="Image 1" descr="C:\Users\whale\git\mwb-b07\presentations\_build\icons\FaServer.png">    </p:cNvPr>
+          <p:cNvPr id="10" name="Image 1" descr="">
+            <a:extLst>
+              <a:ext uri="{C183D7F6-B498-43B3-948B-1728B52AA6E4}">
+                <adec:decorative xmlns:adec="http://schemas.microsoft.com/office/drawing/2017/decorative" val="1"/>
+              </a:ext>
+            </a:extLst>
+          </p:cNvPr>
           <p:cNvPicPr>
             <a:picLocks noChangeAspect="1"/>
           </p:cNvPicPr>
@@ -5919,7 +6134,13 @@
       </p:sp>
       <p:sp>
         <p:nvSpPr>
-          <p:cNvPr id="12" name="Icon FaArrowsRotate"/>
+          <p:cNvPr id="12" name="Icon FaArrowsRotate" descr="">
+            <a:extLst>
+              <a:ext uri="{C183D7F6-B498-43B3-948B-1728B52AA6E4}">
+                <adec:decorative xmlns:adec="http://schemas.microsoft.com/office/drawing/2017/decorative" val="1"/>
+              </a:ext>
+            </a:extLst>
+          </p:cNvPr>
           <p:cNvSpPr/>
           <p:nvPr/>
         </p:nvSpPr>
@@ -5944,7 +6165,13 @@
       </p:sp>
       <p:pic>
         <p:nvPicPr>
-          <p:cNvPr id="13" name="Image 2" descr="C:\Users\whale\git\mwb-b07\presentations\_build\icons\FaArrowsRotate.png">    </p:cNvPr>
+          <p:cNvPr id="13" name="Image 2" descr="">
+            <a:extLst>
+              <a:ext uri="{C183D7F6-B498-43B3-948B-1728B52AA6E4}">
+                <adec:decorative xmlns:adec="http://schemas.microsoft.com/office/drawing/2017/decorative" val="1"/>
+              </a:ext>
+            </a:extLst>
+          </p:cNvPr>
           <p:cNvPicPr>
             <a:picLocks noChangeAspect="1"/>
           </p:cNvPicPr>
@@ -6018,7 +6245,13 @@
       </p:sp>
       <p:sp>
         <p:nvSpPr>
-          <p:cNvPr id="15" name="Decom box"/>
+          <p:cNvPr id="15" name="Decom box" descr="">
+            <a:extLst>
+              <a:ext uri="{C183D7F6-B498-43B3-948B-1728B52AA6E4}">
+                <adec:decorative xmlns:adec="http://schemas.microsoft.com/office/drawing/2017/decorative" val="1"/>
+              </a:ext>
+            </a:extLst>
+          </p:cNvPr>
           <p:cNvSpPr/>
           <p:nvPr/>
         </p:nvSpPr>
@@ -6052,7 +6285,13 @@
       </p:sp>
       <p:sp>
         <p:nvSpPr>
-          <p:cNvPr id="16" name="Icon FaDoorClosed"/>
+          <p:cNvPr id="16" name="Icon FaDoorClosed" descr="">
+            <a:extLst>
+              <a:ext uri="{C183D7F6-B498-43B3-948B-1728B52AA6E4}">
+                <adec:decorative xmlns:adec="http://schemas.microsoft.com/office/drawing/2017/decorative" val="1"/>
+              </a:ext>
+            </a:extLst>
+          </p:cNvPr>
           <p:cNvSpPr/>
           <p:nvPr/>
         </p:nvSpPr>
@@ -6077,7 +6316,13 @@
       </p:sp>
       <p:pic>
         <p:nvPicPr>
-          <p:cNvPr id="17" name="Image 3" descr="C:\Users\whale\git\mwb-b07\presentations\_build\icons\FaDoorClosed.png">    </p:cNvPr>
+          <p:cNvPr id="17" name="Image 3" descr="">
+            <a:extLst>
+              <a:ext uri="{C183D7F6-B498-43B3-948B-1728B52AA6E4}">
+                <adec:decorative xmlns:adec="http://schemas.microsoft.com/office/drawing/2017/decorative" val="1"/>
+              </a:ext>
+            </a:extLst>
+          </p:cNvPr>
           <p:cNvPicPr>
             <a:picLocks noChangeAspect="1"/>
           </p:cNvPicPr>
@@ -6252,7 +6497,13 @@
       </p:sp>
       <p:sp>
         <p:nvSpPr>
-          <p:cNvPr id="20" name="Signals"/>
+          <p:cNvPr id="20" name="Signals" descr="">
+            <a:extLst>
+              <a:ext uri="{C183D7F6-B498-43B3-948B-1728B52AA6E4}">
+                <adec:decorative xmlns:adec="http://schemas.microsoft.com/office/drawing/2017/decorative" val="1"/>
+              </a:ext>
+            </a:extLst>
+          </p:cNvPr>
           <p:cNvSpPr/>
           <p:nvPr/>
         </p:nvSpPr>
@@ -6286,7 +6537,13 @@
       </p:sp>
       <p:sp>
         <p:nvSpPr>
-          <p:cNvPr id="21" name="Icon FaChartLine"/>
+          <p:cNvPr id="21" name="Icon FaChartLine" descr="">
+            <a:extLst>
+              <a:ext uri="{C183D7F6-B498-43B3-948B-1728B52AA6E4}">
+                <adec:decorative xmlns:adec="http://schemas.microsoft.com/office/drawing/2017/decorative" val="1"/>
+              </a:ext>
+            </a:extLst>
+          </p:cNvPr>
           <p:cNvSpPr/>
           <p:nvPr/>
         </p:nvSpPr>
@@ -6311,7 +6568,13 @@
       </p:sp>
       <p:pic>
         <p:nvPicPr>
-          <p:cNvPr id="22" name="Image 4" descr="C:\Users\whale\git\mwb-b07\presentations\_build\icons\FaChartLine.png">    </p:cNvPr>
+          <p:cNvPr id="22" name="Image 4" descr="">
+            <a:extLst>
+              <a:ext uri="{C183D7F6-B498-43B3-948B-1728B52AA6E4}">
+                <adec:decorative xmlns:adec="http://schemas.microsoft.com/office/drawing/2017/decorative" val="1"/>
+              </a:ext>
+            </a:extLst>
+          </p:cNvPr>
           <p:cNvPicPr>
             <a:picLocks noChangeAspect="1"/>
           </p:cNvPicPr>
@@ -6529,7 +6792,13 @@
       </p:sp>
       <p:sp>
         <p:nvSpPr>
-          <p:cNvPr id="3" name="Tag How"/>
+          <p:cNvPr id="3" name="Tag How" descr="">
+            <a:extLst>
+              <a:ext uri="{C183D7F6-B498-43B3-948B-1728B52AA6E4}">
+                <adec:decorative xmlns:adec="http://schemas.microsoft.com/office/drawing/2017/decorative" val="1"/>
+              </a:ext>
+            </a:extLst>
+          </p:cNvPr>
           <p:cNvSpPr/>
           <p:nvPr/>
         </p:nvSpPr>
@@ -6592,7 +6861,13 @@
       </p:sp>
       <p:sp>
         <p:nvSpPr>
-          <p:cNvPr id="5" name="Ask 1"/>
+          <p:cNvPr id="5" name="Ask 1" descr="">
+            <a:extLst>
+              <a:ext uri="{C183D7F6-B498-43B3-948B-1728B52AA6E4}">
+                <adec:decorative xmlns:adec="http://schemas.microsoft.com/office/drawing/2017/decorative" val="1"/>
+              </a:ext>
+            </a:extLst>
+          </p:cNvPr>
           <p:cNvSpPr/>
           <p:nvPr/>
         </p:nvSpPr>
@@ -6626,7 +6901,13 @@
       </p:sp>
       <p:sp>
         <p:nvSpPr>
-          <p:cNvPr id="6" name="Icon FaSitemap"/>
+          <p:cNvPr id="6" name="Icon FaSitemap" descr="">
+            <a:extLst>
+              <a:ext uri="{C183D7F6-B498-43B3-948B-1728B52AA6E4}">
+                <adec:decorative xmlns:adec="http://schemas.microsoft.com/office/drawing/2017/decorative" val="1"/>
+              </a:ext>
+            </a:extLst>
+          </p:cNvPr>
           <p:cNvSpPr/>
           <p:nvPr/>
         </p:nvSpPr>
@@ -6651,7 +6932,13 @@
       </p:sp>
       <p:pic>
         <p:nvPicPr>
-          <p:cNvPr id="7" name="Image 0" descr="C:\Users\whale\git\mwb-b07\presentations\_build\icons\FaSitemap.png">    </p:cNvPr>
+          <p:cNvPr id="7" name="Image 0" descr="">
+            <a:extLst>
+              <a:ext uri="{C183D7F6-B498-43B3-948B-1728B52AA6E4}">
+                <adec:decorative xmlns:adec="http://schemas.microsoft.com/office/drawing/2017/decorative" val="1"/>
+              </a:ext>
+            </a:extLst>
+          </p:cNvPr>
           <p:cNvPicPr>
             <a:picLocks noChangeAspect="1"/>
           </p:cNvPicPr>
@@ -6728,7 +7015,13 @@
       </p:sp>
       <p:sp>
         <p:nvSpPr>
-          <p:cNvPr id="9" name="Ask 2"/>
+          <p:cNvPr id="9" name="Ask 2" descr="">
+            <a:extLst>
+              <a:ext uri="{C183D7F6-B498-43B3-948B-1728B52AA6E4}">
+                <adec:decorative xmlns:adec="http://schemas.microsoft.com/office/drawing/2017/decorative" val="1"/>
+              </a:ext>
+            </a:extLst>
+          </p:cNvPr>
           <p:cNvSpPr/>
           <p:nvPr/>
         </p:nvSpPr>
@@ -6762,7 +7055,13 @@
       </p:sp>
       <p:sp>
         <p:nvSpPr>
-          <p:cNvPr id="10" name="Icon FaLandmark"/>
+          <p:cNvPr id="10" name="Icon FaLandmark" descr="">
+            <a:extLst>
+              <a:ext uri="{C183D7F6-B498-43B3-948B-1728B52AA6E4}">
+                <adec:decorative xmlns:adec="http://schemas.microsoft.com/office/drawing/2017/decorative" val="1"/>
+              </a:ext>
+            </a:extLst>
+          </p:cNvPr>
           <p:cNvSpPr/>
           <p:nvPr/>
         </p:nvSpPr>
@@ -6787,7 +7086,13 @@
       </p:sp>
       <p:pic>
         <p:nvPicPr>
-          <p:cNvPr id="11" name="Image 1" descr="C:\Users\whale\git\mwb-b07\presentations\_build\icons\FaLandmark.png">    </p:cNvPr>
+          <p:cNvPr id="11" name="Image 1" descr="">
+            <a:extLst>
+              <a:ext uri="{C183D7F6-B498-43B3-948B-1728B52AA6E4}">
+                <adec:decorative xmlns:adec="http://schemas.microsoft.com/office/drawing/2017/decorative" val="1"/>
+              </a:ext>
+            </a:extLst>
+          </p:cNvPr>
           <p:cNvPicPr>
             <a:picLocks noChangeAspect="1"/>
           </p:cNvPicPr>
@@ -6864,7 +7169,13 @@
       </p:sp>
       <p:sp>
         <p:nvSpPr>
-          <p:cNvPr id="13" name="Ask 3"/>
+          <p:cNvPr id="13" name="Ask 3" descr="">
+            <a:extLst>
+              <a:ext uri="{C183D7F6-B498-43B3-948B-1728B52AA6E4}">
+                <adec:decorative xmlns:adec="http://schemas.microsoft.com/office/drawing/2017/decorative" val="1"/>
+              </a:ext>
+            </a:extLst>
+          </p:cNvPr>
           <p:cNvSpPr/>
           <p:nvPr/>
         </p:nvSpPr>
@@ -6898,7 +7209,13 @@
       </p:sp>
       <p:sp>
         <p:nvSpPr>
-          <p:cNvPr id="14" name="Icon FaArrowsRotate"/>
+          <p:cNvPr id="14" name="Icon FaArrowsRotate" descr="">
+            <a:extLst>
+              <a:ext uri="{C183D7F6-B498-43B3-948B-1728B52AA6E4}">
+                <adec:decorative xmlns:adec="http://schemas.microsoft.com/office/drawing/2017/decorative" val="1"/>
+              </a:ext>
+            </a:extLst>
+          </p:cNvPr>
           <p:cNvSpPr/>
           <p:nvPr/>
         </p:nvSpPr>
@@ -6923,7 +7240,13 @@
       </p:sp>
       <p:pic>
         <p:nvPicPr>
-          <p:cNvPr id="15" name="Image 2" descr="C:\Users\whale\git\mwb-b07\presentations\_build\icons\FaArrowsRotate.png">    </p:cNvPr>
+          <p:cNvPr id="15" name="Image 2" descr="">
+            <a:extLst>
+              <a:ext uri="{C183D7F6-B498-43B3-948B-1728B52AA6E4}">
+                <adec:decorative xmlns:adec="http://schemas.microsoft.com/office/drawing/2017/decorative" val="1"/>
+              </a:ext>
+            </a:extLst>
+          </p:cNvPr>
           <p:cNvPicPr>
             <a:picLocks noChangeAspect="1"/>
           </p:cNvPicPr>
@@ -7000,7 +7323,13 @@
       </p:sp>
       <p:sp>
         <p:nvSpPr>
-          <p:cNvPr id="17" name="Ask 4"/>
+          <p:cNvPr id="17" name="Ask 4" descr="">
+            <a:extLst>
+              <a:ext uri="{C183D7F6-B498-43B3-948B-1728B52AA6E4}">
+                <adec:decorative xmlns:adec="http://schemas.microsoft.com/office/drawing/2017/decorative" val="1"/>
+              </a:ext>
+            </a:extLst>
+          </p:cNvPr>
           <p:cNvSpPr/>
           <p:nvPr/>
         </p:nvSpPr>
@@ -7034,7 +7363,13 @@
       </p:sp>
       <p:sp>
         <p:nvSpPr>
-          <p:cNvPr id="18" name="Icon FaUserCheck"/>
+          <p:cNvPr id="18" name="Icon FaUserCheck" descr="">
+            <a:extLst>
+              <a:ext uri="{C183D7F6-B498-43B3-948B-1728B52AA6E4}">
+                <adec:decorative xmlns:adec="http://schemas.microsoft.com/office/drawing/2017/decorative" val="1"/>
+              </a:ext>
+            </a:extLst>
+          </p:cNvPr>
           <p:cNvSpPr/>
           <p:nvPr/>
         </p:nvSpPr>
@@ -7059,7 +7394,13 @@
       </p:sp>
       <p:pic>
         <p:nvPicPr>
-          <p:cNvPr id="19" name="Image 3" descr="C:\Users\whale\git\mwb-b07\presentations\_build\icons\FaUserCheck.png">    </p:cNvPr>
+          <p:cNvPr id="19" name="Image 3" descr="">
+            <a:extLst>
+              <a:ext uri="{C183D7F6-B498-43B3-948B-1728B52AA6E4}">
+                <adec:decorative xmlns:adec="http://schemas.microsoft.com/office/drawing/2017/decorative" val="1"/>
+              </a:ext>
+            </a:extLst>
+          </p:cNvPr>
           <p:cNvPicPr>
             <a:picLocks noChangeAspect="1"/>
           </p:cNvPicPr>
@@ -7136,7 +7477,13 @@
       </p:sp>
       <p:sp>
         <p:nvSpPr>
-          <p:cNvPr id="21" name="Next"/>
+          <p:cNvPr id="21" name="Next" descr="">
+            <a:extLst>
+              <a:ext uri="{C183D7F6-B498-43B3-948B-1728B52AA6E4}">
+                <adec:decorative xmlns:adec="http://schemas.microsoft.com/office/drawing/2017/decorative" val="1"/>
+              </a:ext>
+            </a:extLst>
+          </p:cNvPr>
           <p:cNvSpPr/>
           <p:nvPr/>
         </p:nvSpPr>
@@ -7170,7 +7517,13 @@
       </p:sp>
       <p:sp>
         <p:nvSpPr>
-          <p:cNvPr id="22" name="Icon FaRoute"/>
+          <p:cNvPr id="22" name="Icon FaRoute" descr="">
+            <a:extLst>
+              <a:ext uri="{C183D7F6-B498-43B3-948B-1728B52AA6E4}">
+                <adec:decorative xmlns:adec="http://schemas.microsoft.com/office/drawing/2017/decorative" val="1"/>
+              </a:ext>
+            </a:extLst>
+          </p:cNvPr>
           <p:cNvSpPr/>
           <p:nvPr/>
         </p:nvSpPr>
@@ -7195,7 +7548,13 @@
       </p:sp>
       <p:pic>
         <p:nvPicPr>
-          <p:cNvPr id="23" name="Image 4" descr="C:\Users\whale\git\mwb-b07\presentations\_build\icons\FaRoute.png">    </p:cNvPr>
+          <p:cNvPr id="23" name="Image 4" descr="">
+            <a:extLst>
+              <a:ext uri="{C183D7F6-B498-43B3-948B-1728B52AA6E4}">
+                <adec:decorative xmlns:adec="http://schemas.microsoft.com/office/drawing/2017/decorative" val="1"/>
+              </a:ext>
+            </a:extLst>
+          </p:cNvPr>
           <p:cNvPicPr>
             <a:picLocks noChangeAspect="1"/>
           </p:cNvPicPr>
@@ -7837,7 +8196,13 @@
       </p:sp>
       <p:sp>
         <p:nvSpPr>
-          <p:cNvPr id="3" name="Tag Why"/>
+          <p:cNvPr id="3" name="Tag Why" descr="">
+            <a:extLst>
+              <a:ext uri="{C183D7F6-B498-43B3-948B-1728B52AA6E4}">
+                <adec:decorative xmlns:adec="http://schemas.microsoft.com/office/drawing/2017/decorative" val="1"/>
+              </a:ext>
+            </a:extLst>
+          </p:cNvPr>
           <p:cNvSpPr/>
           <p:nvPr/>
         </p:nvSpPr>
@@ -7936,7 +8301,13 @@
       </p:sp>
       <p:sp>
         <p:nvSpPr>
-          <p:cNvPr id="6" name="Dep 0"/>
+          <p:cNvPr id="6" name="Dep 0" descr="">
+            <a:extLst>
+              <a:ext uri="{C183D7F6-B498-43B3-948B-1728B52AA6E4}">
+                <adec:decorative xmlns:adec="http://schemas.microsoft.com/office/drawing/2017/decorative" val="1"/>
+              </a:ext>
+            </a:extLst>
+          </p:cNvPr>
           <p:cNvSpPr/>
           <p:nvPr/>
         </p:nvSpPr>
@@ -8017,7 +8388,13 @@
       </p:sp>
       <p:sp>
         <p:nvSpPr>
-          <p:cNvPr id="8" name="Dep 1"/>
+          <p:cNvPr id="8" name="Dep 1" descr="">
+            <a:extLst>
+              <a:ext uri="{C183D7F6-B498-43B3-948B-1728B52AA6E4}">
+                <adec:decorative xmlns:adec="http://schemas.microsoft.com/office/drawing/2017/decorative" val="1"/>
+              </a:ext>
+            </a:extLst>
+          </p:cNvPr>
           <p:cNvSpPr/>
           <p:nvPr/>
         </p:nvSpPr>
@@ -8098,7 +8475,13 @@
       </p:sp>
       <p:sp>
         <p:nvSpPr>
-          <p:cNvPr id="10" name="Dep 2"/>
+          <p:cNvPr id="10" name="Dep 2" descr="">
+            <a:extLst>
+              <a:ext uri="{C183D7F6-B498-43B3-948B-1728B52AA6E4}">
+                <adec:decorative xmlns:adec="http://schemas.microsoft.com/office/drawing/2017/decorative" val="1"/>
+              </a:ext>
+            </a:extLst>
+          </p:cNvPr>
           <p:cNvSpPr/>
           <p:nvPr/>
         </p:nvSpPr>
@@ -8179,7 +8562,13 @@
       </p:sp>
       <p:sp>
         <p:nvSpPr>
-          <p:cNvPr id="12" name="Dep 3"/>
+          <p:cNvPr id="12" name="Dep 3" descr="">
+            <a:extLst>
+              <a:ext uri="{C183D7F6-B498-43B3-948B-1728B52AA6E4}">
+                <adec:decorative xmlns:adec="http://schemas.microsoft.com/office/drawing/2017/decorative" val="1"/>
+              </a:ext>
+            </a:extLst>
+          </p:cNvPr>
           <p:cNvSpPr/>
           <p:nvPr/>
         </p:nvSpPr>
@@ -8260,7 +8649,13 @@
       </p:sp>
       <p:sp>
         <p:nvSpPr>
-          <p:cNvPr id="14" name="Dep 4"/>
+          <p:cNvPr id="14" name="Dep 4" descr="">
+            <a:extLst>
+              <a:ext uri="{C183D7F6-B498-43B3-948B-1728B52AA6E4}">
+                <adec:decorative xmlns:adec="http://schemas.microsoft.com/office/drawing/2017/decorative" val="1"/>
+              </a:ext>
+            </a:extLst>
+          </p:cNvPr>
           <p:cNvSpPr/>
           <p:nvPr/>
         </p:nvSpPr>
@@ -8341,7 +8736,13 @@
       </p:sp>
       <p:sp>
         <p:nvSpPr>
-          <p:cNvPr id="16" name="Clocks box"/>
+          <p:cNvPr id="16" name="Clocks box" descr="">
+            <a:extLst>
+              <a:ext uri="{C183D7F6-B498-43B3-948B-1728B52AA6E4}">
+                <adec:decorative xmlns:adec="http://schemas.microsoft.com/office/drawing/2017/decorative" val="1"/>
+              </a:ext>
+            </a:extLst>
+          </p:cNvPr>
           <p:cNvSpPr/>
           <p:nvPr/>
         </p:nvSpPr>
@@ -8375,7 +8776,13 @@
       </p:sp>
       <p:sp>
         <p:nvSpPr>
-          <p:cNvPr id="17" name="Icon FaUserClock"/>
+          <p:cNvPr id="17" name="Icon FaUserClock" descr="">
+            <a:extLst>
+              <a:ext uri="{C183D7F6-B498-43B3-948B-1728B52AA6E4}">
+                <adec:decorative xmlns:adec="http://schemas.microsoft.com/office/drawing/2017/decorative" val="1"/>
+              </a:ext>
+            </a:extLst>
+          </p:cNvPr>
           <p:cNvSpPr/>
           <p:nvPr/>
         </p:nvSpPr>
@@ -8400,7 +8807,13 @@
       </p:sp>
       <p:pic>
         <p:nvPicPr>
-          <p:cNvPr id="18" name="Image 0" descr="C:\Users\whale\git\mwb-b07\presentations\_build\icons\FaUserClock.png">    </p:cNvPr>
+          <p:cNvPr id="18" name="Image 0" descr="">
+            <a:extLst>
+              <a:ext uri="{C183D7F6-B498-43B3-948B-1728B52AA6E4}">
+                <adec:decorative xmlns:adec="http://schemas.microsoft.com/office/drawing/2017/decorative" val="1"/>
+              </a:ext>
+            </a:extLst>
+          </p:cNvPr>
           <p:cNvPicPr>
             <a:picLocks noChangeAspect="1"/>
           </p:cNvPicPr>
@@ -8563,7 +8976,13 @@
       </p:sp>
       <p:sp>
         <p:nvSpPr>
-          <p:cNvPr id="21" name="Twice over"/>
+          <p:cNvPr id="21" name="Twice over" descr="">
+            <a:extLst>
+              <a:ext uri="{C183D7F6-B498-43B3-948B-1728B52AA6E4}">
+                <adec:decorative xmlns:adec="http://schemas.microsoft.com/office/drawing/2017/decorative" val="1"/>
+              </a:ext>
+            </a:extLst>
+          </p:cNvPr>
           <p:cNvSpPr/>
           <p:nvPr/>
         </p:nvSpPr>
@@ -8597,7 +9016,13 @@
       </p:sp>
       <p:sp>
         <p:nvSpPr>
-          <p:cNvPr id="22" name="Icon FaTriangleExclamation"/>
+          <p:cNvPr id="22" name="Icon FaTriangleExclamation" descr="">
+            <a:extLst>
+              <a:ext uri="{C183D7F6-B498-43B3-948B-1728B52AA6E4}">
+                <adec:decorative xmlns:adec="http://schemas.microsoft.com/office/drawing/2017/decorative" val="1"/>
+              </a:ext>
+            </a:extLst>
+          </p:cNvPr>
           <p:cNvSpPr/>
           <p:nvPr/>
         </p:nvSpPr>
@@ -8622,7 +9047,13 @@
       </p:sp>
       <p:pic>
         <p:nvPicPr>
-          <p:cNvPr id="23" name="Image 1" descr="C:\Users\whale\git\mwb-b07\presentations\_build\icons\FaTriangleExclamation.png">    </p:cNvPr>
+          <p:cNvPr id="23" name="Image 1" descr="">
+            <a:extLst>
+              <a:ext uri="{C183D7F6-B498-43B3-948B-1728B52AA6E4}">
+                <adec:decorative xmlns:adec="http://schemas.microsoft.com/office/drawing/2017/decorative" val="1"/>
+              </a:ext>
+            </a:extLst>
+          </p:cNvPr>
           <p:cNvPicPr>
             <a:picLocks noChangeAspect="1"/>
           </p:cNvPicPr>
@@ -8840,7 +9271,13 @@
       </p:sp>
       <p:sp>
         <p:nvSpPr>
-          <p:cNvPr id="3" name="Tag Why"/>
+          <p:cNvPr id="3" name="Tag Why" descr="">
+            <a:extLst>
+              <a:ext uri="{C183D7F6-B498-43B3-948B-1728B52AA6E4}">
+                <adec:decorative xmlns:adec="http://schemas.microsoft.com/office/drawing/2017/decorative" val="1"/>
+              </a:ext>
+            </a:extLst>
+          </p:cNvPr>
           <p:cNvSpPr/>
           <p:nvPr/>
         </p:nvSpPr>
@@ -8922,7 +9359,7 @@
         <a:graphic>
           <a:graphicData uri="http://schemas.openxmlformats.org/drawingml/2006/table">
             <a:tbl>
-              <a:tblPr/>
+              <a:tblPr firstRow="1" bandRow="1"/>
               <a:tblGrid>
                 <a:gridCol w="2514600"/>
                 <a:gridCol w="1600200"/>
@@ -10000,7 +10437,13 @@
       </p:sp>
       <p:sp>
         <p:nvSpPr>
-          <p:cNvPr id="7" name="Side 0"/>
+          <p:cNvPr id="7" name="Side 0" descr="">
+            <a:extLst>
+              <a:ext uri="{C183D7F6-B498-43B3-948B-1728B52AA6E4}">
+                <adec:decorative xmlns:adec="http://schemas.microsoft.com/office/drawing/2017/decorative" val="1"/>
+              </a:ext>
+            </a:extLst>
+          </p:cNvPr>
           <p:cNvSpPr/>
           <p:nvPr/>
         </p:nvSpPr>
@@ -10034,7 +10477,13 @@
       </p:sp>
       <p:sp>
         <p:nvSpPr>
-          <p:cNvPr id="8" name="Icon FaKey"/>
+          <p:cNvPr id="8" name="Icon FaKey" descr="">
+            <a:extLst>
+              <a:ext uri="{C183D7F6-B498-43B3-948B-1728B52AA6E4}">
+                <adec:decorative xmlns:adec="http://schemas.microsoft.com/office/drawing/2017/decorative" val="1"/>
+              </a:ext>
+            </a:extLst>
+          </p:cNvPr>
           <p:cNvSpPr/>
           <p:nvPr/>
         </p:nvSpPr>
@@ -10059,7 +10508,13 @@
       </p:sp>
       <p:pic>
         <p:nvPicPr>
-          <p:cNvPr id="9" name="Image 0" descr="C:\Users\whale\git\mwb-b07\presentations\_build\icons\FaKey.png">    </p:cNvPr>
+          <p:cNvPr id="9" name="Image 0" descr="">
+            <a:extLst>
+              <a:ext uri="{C183D7F6-B498-43B3-948B-1728B52AA6E4}">
+                <adec:decorative xmlns:adec="http://schemas.microsoft.com/office/drawing/2017/decorative" val="1"/>
+              </a:ext>
+            </a:extLst>
+          </p:cNvPr>
           <p:cNvPicPr>
             <a:picLocks noChangeAspect="1"/>
           </p:cNvPicPr>
@@ -10136,7 +10591,13 @@
       </p:sp>
       <p:sp>
         <p:nvSpPr>
-          <p:cNvPr id="11" name="Side 1"/>
+          <p:cNvPr id="11" name="Side 1" descr="">
+            <a:extLst>
+              <a:ext uri="{C183D7F6-B498-43B3-948B-1728B52AA6E4}">
+                <adec:decorative xmlns:adec="http://schemas.microsoft.com/office/drawing/2017/decorative" val="1"/>
+              </a:ext>
+            </a:extLst>
+          </p:cNvPr>
           <p:cNvSpPr/>
           <p:nvPr/>
         </p:nvSpPr>
@@ -10170,7 +10631,13 @@
       </p:sp>
       <p:sp>
         <p:nvSpPr>
-          <p:cNvPr id="12" name="Icon FaLock"/>
+          <p:cNvPr id="12" name="Icon FaLock" descr="">
+            <a:extLst>
+              <a:ext uri="{C183D7F6-B498-43B3-948B-1728B52AA6E4}">
+                <adec:decorative xmlns:adec="http://schemas.microsoft.com/office/drawing/2017/decorative" val="1"/>
+              </a:ext>
+            </a:extLst>
+          </p:cNvPr>
           <p:cNvSpPr/>
           <p:nvPr/>
         </p:nvSpPr>
@@ -10195,7 +10662,13 @@
       </p:sp>
       <p:pic>
         <p:nvPicPr>
-          <p:cNvPr id="13" name="Image 1" descr="C:\Users\whale\git\mwb-b07\presentations\_build\icons\FaLock.png">    </p:cNvPr>
+          <p:cNvPr id="13" name="Image 1" descr="">
+            <a:extLst>
+              <a:ext uri="{C183D7F6-B498-43B3-948B-1728B52AA6E4}">
+                <adec:decorative xmlns:adec="http://schemas.microsoft.com/office/drawing/2017/decorative" val="1"/>
+              </a:ext>
+            </a:extLst>
+          </p:cNvPr>
           <p:cNvPicPr>
             <a:picLocks noChangeAspect="1"/>
           </p:cNvPicPr>
@@ -10272,7 +10745,13 @@
       </p:sp>
       <p:sp>
         <p:nvSpPr>
-          <p:cNvPr id="15" name="Own program"/>
+          <p:cNvPr id="15" name="Own program" descr="">
+            <a:extLst>
+              <a:ext uri="{C183D7F6-B498-43B3-948B-1728B52AA6E4}">
+                <adec:decorative xmlns:adec="http://schemas.microsoft.com/office/drawing/2017/decorative" val="1"/>
+              </a:ext>
+            </a:extLst>
+          </p:cNvPr>
           <p:cNvSpPr/>
           <p:nvPr/>
         </p:nvSpPr>
@@ -10306,7 +10785,13 @@
       </p:sp>
       <p:sp>
         <p:nvSpPr>
-          <p:cNvPr id="16" name="Icon FaRoute"/>
+          <p:cNvPr id="16" name="Icon FaRoute" descr="">
+            <a:extLst>
+              <a:ext uri="{C183D7F6-B498-43B3-948B-1728B52AA6E4}">
+                <adec:decorative xmlns:adec="http://schemas.microsoft.com/office/drawing/2017/decorative" val="1"/>
+              </a:ext>
+            </a:extLst>
+          </p:cNvPr>
           <p:cNvSpPr/>
           <p:nvPr/>
         </p:nvSpPr>
@@ -10331,7 +10816,13 @@
       </p:sp>
       <p:pic>
         <p:nvPicPr>
-          <p:cNvPr id="17" name="Image 2" descr="C:\Users\whale\git\mwb-b07\presentations\_build\icons\FaRoute.png">    </p:cNvPr>
+          <p:cNvPr id="17" name="Image 2" descr="">
+            <a:extLst>
+              <a:ext uri="{C183D7F6-B498-43B3-948B-1728B52AA6E4}">
+                <adec:decorative xmlns:adec="http://schemas.microsoft.com/office/drawing/2017/decorative" val="1"/>
+              </a:ext>
+            </a:extLst>
+          </p:cNvPr>
           <p:cNvPicPr>
             <a:picLocks noChangeAspect="1"/>
           </p:cNvPicPr>
@@ -10549,7 +11040,13 @@
       </p:sp>
       <p:sp>
         <p:nvSpPr>
-          <p:cNvPr id="3" name="Tag What"/>
+          <p:cNvPr id="3" name="Tag What" descr="">
+            <a:extLst>
+              <a:ext uri="{C183D7F6-B498-43B3-948B-1728B52AA6E4}">
+                <adec:decorative xmlns:adec="http://schemas.microsoft.com/office/drawing/2017/decorative" val="1"/>
+              </a:ext>
+            </a:extLst>
+          </p:cNvPr>
           <p:cNvSpPr/>
           <p:nvPr/>
         </p:nvSpPr>
@@ -10648,7 +11145,13 @@
       </p:sp>
       <p:sp>
         <p:nvSpPr>
-          <p:cNvPr id="6" name="Verdict 0"/>
+          <p:cNvPr id="6" name="Verdict 0" descr="">
+            <a:extLst>
+              <a:ext uri="{C183D7F6-B498-43B3-948B-1728B52AA6E4}">
+                <adec:decorative xmlns:adec="http://schemas.microsoft.com/office/drawing/2017/decorative" val="1"/>
+              </a:ext>
+            </a:extLst>
+          </p:cNvPr>
           <p:cNvSpPr/>
           <p:nvPr/>
         </p:nvSpPr>
@@ -10735,7 +11238,13 @@
       </p:sp>
       <p:sp>
         <p:nvSpPr>
-          <p:cNvPr id="8" name="Verdict 1"/>
+          <p:cNvPr id="8" name="Verdict 1" descr="">
+            <a:extLst>
+              <a:ext uri="{C183D7F6-B498-43B3-948B-1728B52AA6E4}">
+                <adec:decorative xmlns:adec="http://schemas.microsoft.com/office/drawing/2017/decorative" val="1"/>
+              </a:ext>
+            </a:extLst>
+          </p:cNvPr>
           <p:cNvSpPr/>
           <p:nvPr/>
         </p:nvSpPr>
@@ -10822,7 +11331,13 @@
       </p:sp>
       <p:sp>
         <p:nvSpPr>
-          <p:cNvPr id="10" name="Verdict 2"/>
+          <p:cNvPr id="10" name="Verdict 2" descr="">
+            <a:extLst>
+              <a:ext uri="{C183D7F6-B498-43B3-948B-1728B52AA6E4}">
+                <adec:decorative xmlns:adec="http://schemas.microsoft.com/office/drawing/2017/decorative" val="1"/>
+              </a:ext>
+            </a:extLst>
+          </p:cNvPr>
           <p:cNvSpPr/>
           <p:nvPr/>
         </p:nvSpPr>
@@ -10909,7 +11424,13 @@
       </p:sp>
       <p:sp>
         <p:nvSpPr>
-          <p:cNvPr id="12" name="Verdict 3"/>
+          <p:cNvPr id="12" name="Verdict 3" descr="">
+            <a:extLst>
+              <a:ext uri="{C183D7F6-B498-43B3-948B-1728B52AA6E4}">
+                <adec:decorative xmlns:adec="http://schemas.microsoft.com/office/drawing/2017/decorative" val="1"/>
+              </a:ext>
+            </a:extLst>
+          </p:cNvPr>
           <p:cNvSpPr/>
           <p:nvPr/>
         </p:nvSpPr>
@@ -11072,7 +11593,13 @@
       </p:sp>
       <p:sp>
         <p:nvSpPr>
-          <p:cNvPr id="15" name="Order"/>
+          <p:cNvPr id="15" name="Order" descr="">
+            <a:extLst>
+              <a:ext uri="{C183D7F6-B498-43B3-948B-1728B52AA6E4}">
+                <adec:decorative xmlns:adec="http://schemas.microsoft.com/office/drawing/2017/decorative" val="1"/>
+              </a:ext>
+            </a:extLst>
+          </p:cNvPr>
           <p:cNvSpPr/>
           <p:nvPr/>
         </p:nvSpPr>
@@ -11106,7 +11633,13 @@
       </p:sp>
       <p:sp>
         <p:nvSpPr>
-          <p:cNvPr id="16" name="Icon FaFilter"/>
+          <p:cNvPr id="16" name="Icon FaFilter" descr="">
+            <a:extLst>
+              <a:ext uri="{C183D7F6-B498-43B3-948B-1728B52AA6E4}">
+                <adec:decorative xmlns:adec="http://schemas.microsoft.com/office/drawing/2017/decorative" val="1"/>
+              </a:ext>
+            </a:extLst>
+          </p:cNvPr>
           <p:cNvSpPr/>
           <p:nvPr/>
         </p:nvSpPr>
@@ -11131,7 +11664,13 @@
       </p:sp>
       <p:pic>
         <p:nvPicPr>
-          <p:cNvPr id="17" name="Image 0" descr="C:\Users\whale\git\mwb-b07\presentations\_build\icons\FaFilter.png">    </p:cNvPr>
+          <p:cNvPr id="17" name="Image 0" descr="">
+            <a:extLst>
+              <a:ext uri="{C183D7F6-B498-43B3-948B-1728B52AA6E4}">
+                <adec:decorative xmlns:adec="http://schemas.microsoft.com/office/drawing/2017/decorative" val="1"/>
+              </a:ext>
+            </a:extLst>
+          </p:cNvPr>
           <p:cNvPicPr>
             <a:picLocks noChangeAspect="1"/>
           </p:cNvPicPr>
@@ -11349,7 +11888,13 @@
       </p:sp>
       <p:sp>
         <p:nvSpPr>
-          <p:cNvPr id="3" name="Tag What"/>
+          <p:cNvPr id="3" name="Tag What" descr="">
+            <a:extLst>
+              <a:ext uri="{C183D7F6-B498-43B3-948B-1728B52AA6E4}">
+                <adec:decorative xmlns:adec="http://schemas.microsoft.com/office/drawing/2017/decorative" val="1"/>
+              </a:ext>
+            </a:extLst>
+          </p:cNvPr>
           <p:cNvSpPr/>
           <p:nvPr/>
         </p:nvSpPr>
@@ -11431,7 +11976,7 @@
         <a:graphic>
           <a:graphicData uri="http://schemas.openxmlformats.org/drawingml/2006/table">
             <a:tbl>
-              <a:tblPr/>
+              <a:tblPr firstRow="1" bandRow="1"/>
               <a:tblGrid>
                 <a:gridCol w="868680"/>
                 <a:gridCol w="5029200"/>
@@ -13910,7 +14455,13 @@
       </p:graphicFrame>
       <p:sp>
         <p:nvSpPr>
-          <p:cNvPr id="6" name="Gate"/>
+          <p:cNvPr id="6" name="Gate" descr="">
+            <a:extLst>
+              <a:ext uri="{C183D7F6-B498-43B3-948B-1728B52AA6E4}">
+                <adec:decorative xmlns:adec="http://schemas.microsoft.com/office/drawing/2017/decorative" val="1"/>
+              </a:ext>
+            </a:extLst>
+          </p:cNvPr>
           <p:cNvSpPr/>
           <p:nvPr/>
         </p:nvSpPr>
@@ -13944,7 +14495,13 @@
       </p:sp>
       <p:sp>
         <p:nvSpPr>
-          <p:cNvPr id="7" name="Icon FaShieldHalved"/>
+          <p:cNvPr id="7" name="Icon FaShieldHalved" descr="">
+            <a:extLst>
+              <a:ext uri="{C183D7F6-B498-43B3-948B-1728B52AA6E4}">
+                <adec:decorative xmlns:adec="http://schemas.microsoft.com/office/drawing/2017/decorative" val="1"/>
+              </a:ext>
+            </a:extLst>
+          </p:cNvPr>
           <p:cNvSpPr/>
           <p:nvPr/>
         </p:nvSpPr>
@@ -13969,7 +14526,13 @@
       </p:sp>
       <p:pic>
         <p:nvPicPr>
-          <p:cNvPr id="8" name="Image 0" descr="C:\Users\whale\git\mwb-b07\presentations\_build\icons\FaShieldHalved.png">    </p:cNvPr>
+          <p:cNvPr id="8" name="Image 0" descr="">
+            <a:extLst>
+              <a:ext uri="{C183D7F6-B498-43B3-948B-1728B52AA6E4}">
+                <adec:decorative xmlns:adec="http://schemas.microsoft.com/office/drawing/2017/decorative" val="1"/>
+              </a:ext>
+            </a:extLst>
+          </p:cNvPr>
           <p:cNvPicPr>
             <a:picLocks noChangeAspect="1"/>
           </p:cNvPicPr>
@@ -14187,7 +14750,13 @@
       </p:sp>
       <p:sp>
         <p:nvSpPr>
-          <p:cNvPr id="3" name="Tag What"/>
+          <p:cNvPr id="3" name="Tag What" descr="">
+            <a:extLst>
+              <a:ext uri="{C183D7F6-B498-43B3-948B-1728B52AA6E4}">
+                <adec:decorative xmlns:adec="http://schemas.microsoft.com/office/drawing/2017/decorative" val="1"/>
+              </a:ext>
+            </a:extLst>
+          </p:cNvPr>
           <p:cNvSpPr/>
           <p:nvPr/>
         </p:nvSpPr>
@@ -14250,7 +14819,13 @@
       </p:sp>
       <p:sp>
         <p:nvSpPr>
-          <p:cNvPr id="5" name="Issuer 0"/>
+          <p:cNvPr id="5" name="Issuer 0" descr="">
+            <a:extLst>
+              <a:ext uri="{C183D7F6-B498-43B3-948B-1728B52AA6E4}">
+                <adec:decorative xmlns:adec="http://schemas.microsoft.com/office/drawing/2017/decorative" val="1"/>
+              </a:ext>
+            </a:extLst>
+          </p:cNvPr>
           <p:cNvSpPr/>
           <p:nvPr/>
         </p:nvSpPr>
@@ -14284,7 +14859,13 @@
       </p:sp>
       <p:sp>
         <p:nvSpPr>
-          <p:cNvPr id="6" name="Icon FaCloud"/>
+          <p:cNvPr id="6" name="Icon FaCloud" descr="">
+            <a:extLst>
+              <a:ext uri="{C183D7F6-B498-43B3-948B-1728B52AA6E4}">
+                <adec:decorative xmlns:adec="http://schemas.microsoft.com/office/drawing/2017/decorative" val="1"/>
+              </a:ext>
+            </a:extLst>
+          </p:cNvPr>
           <p:cNvSpPr/>
           <p:nvPr/>
         </p:nvSpPr>
@@ -14309,7 +14890,13 @@
       </p:sp>
       <p:pic>
         <p:nvPicPr>
-          <p:cNvPr id="7" name="Image 0" descr="C:\Users\whale\git\mwb-b07\presentations\_build\icons\FaCloud.png">    </p:cNvPr>
+          <p:cNvPr id="7" name="Image 0" descr="">
+            <a:extLst>
+              <a:ext uri="{C183D7F6-B498-43B3-948B-1728B52AA6E4}">
+                <adec:decorative xmlns:adec="http://schemas.microsoft.com/office/drawing/2017/decorative" val="1"/>
+              </a:ext>
+            </a:extLst>
+          </p:cNvPr>
           <p:cNvPicPr>
             <a:picLocks noChangeAspect="1"/>
           </p:cNvPicPr>
@@ -14448,7 +15035,13 @@
       </p:sp>
       <p:sp>
         <p:nvSpPr>
-          <p:cNvPr id="10" name="Issuer 1"/>
+          <p:cNvPr id="10" name="Issuer 1" descr="">
+            <a:extLst>
+              <a:ext uri="{C183D7F6-B498-43B3-948B-1728B52AA6E4}">
+                <adec:decorative xmlns:adec="http://schemas.microsoft.com/office/drawing/2017/decorative" val="1"/>
+              </a:ext>
+            </a:extLst>
+          </p:cNvPr>
           <p:cNvSpPr/>
           <p:nvPr/>
         </p:nvSpPr>
@@ -14482,7 +15075,13 @@
       </p:sp>
       <p:sp>
         <p:nvSpPr>
-          <p:cNvPr id="11" name="Icon FaServer"/>
+          <p:cNvPr id="11" name="Icon FaServer" descr="">
+            <a:extLst>
+              <a:ext uri="{C183D7F6-B498-43B3-948B-1728B52AA6E4}">
+                <adec:decorative xmlns:adec="http://schemas.microsoft.com/office/drawing/2017/decorative" val="1"/>
+              </a:ext>
+            </a:extLst>
+          </p:cNvPr>
           <p:cNvSpPr/>
           <p:nvPr/>
         </p:nvSpPr>
@@ -14507,7 +15106,13 @@
       </p:sp>
       <p:pic>
         <p:nvPicPr>
-          <p:cNvPr id="12" name="Image 1" descr="C:\Users\whale\git\mwb-b07\presentations\_build\icons\FaServer.png">    </p:cNvPr>
+          <p:cNvPr id="12" name="Image 1" descr="">
+            <a:extLst>
+              <a:ext uri="{C183D7F6-B498-43B3-948B-1728B52AA6E4}">
+                <adec:decorative xmlns:adec="http://schemas.microsoft.com/office/drawing/2017/decorative" val="1"/>
+              </a:ext>
+            </a:extLst>
+          </p:cNvPr>
           <p:cNvPicPr>
             <a:picLocks noChangeAspect="1"/>
           </p:cNvPicPr>
@@ -14646,7 +15251,13 @@
       </p:sp>
       <p:sp>
         <p:nvSpPr>
-          <p:cNvPr id="15" name="Issuer 2"/>
+          <p:cNvPr id="15" name="Issuer 2" descr="">
+            <a:extLst>
+              <a:ext uri="{C183D7F6-B498-43B3-948B-1728B52AA6E4}">
+                <adec:decorative xmlns:adec="http://schemas.microsoft.com/office/drawing/2017/decorative" val="1"/>
+              </a:ext>
+            </a:extLst>
+          </p:cNvPr>
           <p:cNvSpPr/>
           <p:nvPr/>
         </p:nvSpPr>
@@ -14680,7 +15291,13 @@
       </p:sp>
       <p:sp>
         <p:nvSpPr>
-          <p:cNvPr id="16" name="Icon FaIdCard"/>
+          <p:cNvPr id="16" name="Icon FaIdCard" descr="">
+            <a:extLst>
+              <a:ext uri="{C183D7F6-B498-43B3-948B-1728B52AA6E4}">
+                <adec:decorative xmlns:adec="http://schemas.microsoft.com/office/drawing/2017/decorative" val="1"/>
+              </a:ext>
+            </a:extLst>
+          </p:cNvPr>
           <p:cNvSpPr/>
           <p:nvPr/>
         </p:nvSpPr>
@@ -14705,7 +15322,13 @@
       </p:sp>
       <p:pic>
         <p:nvPicPr>
-          <p:cNvPr id="17" name="Image 2" descr="C:\Users\whale\git\mwb-b07\presentations\_build\icons\FaIdCard.png">    </p:cNvPr>
+          <p:cNvPr id="17" name="Image 2" descr="">
+            <a:extLst>
+              <a:ext uri="{C183D7F6-B498-43B3-948B-1728B52AA6E4}">
+                <adec:decorative xmlns:adec="http://schemas.microsoft.com/office/drawing/2017/decorative" val="1"/>
+              </a:ext>
+            </a:extLst>
+          </p:cNvPr>
           <p:cNvPicPr>
             <a:picLocks noChangeAspect="1"/>
           </p:cNvPicPr>
@@ -14844,7 +15467,13 @@
       </p:sp>
       <p:sp>
         <p:nvSpPr>
-          <p:cNvPr id="20" name="Issuer 3"/>
+          <p:cNvPr id="20" name="Issuer 3" descr="">
+            <a:extLst>
+              <a:ext uri="{C183D7F6-B498-43B3-948B-1728B52AA6E4}">
+                <adec:decorative xmlns:adec="http://schemas.microsoft.com/office/drawing/2017/decorative" val="1"/>
+              </a:ext>
+            </a:extLst>
+          </p:cNvPr>
           <p:cNvSpPr/>
           <p:nvPr/>
         </p:nvSpPr>
@@ -14878,7 +15507,13 @@
       </p:sp>
       <p:sp>
         <p:nvSpPr>
-          <p:cNvPr id="21" name="Icon FaGlobe"/>
+          <p:cNvPr id="21" name="Icon FaGlobe" descr="">
+            <a:extLst>
+              <a:ext uri="{C183D7F6-B498-43B3-948B-1728B52AA6E4}">
+                <adec:decorative xmlns:adec="http://schemas.microsoft.com/office/drawing/2017/decorative" val="1"/>
+              </a:ext>
+            </a:extLst>
+          </p:cNvPr>
           <p:cNvSpPr/>
           <p:nvPr/>
         </p:nvSpPr>
@@ -14903,7 +15538,13 @@
       </p:sp>
       <p:pic>
         <p:nvPicPr>
-          <p:cNvPr id="22" name="Image 3" descr="C:\Users\whale\git\mwb-b07\presentations\_build\icons\FaGlobe.png">    </p:cNvPr>
+          <p:cNvPr id="22" name="Image 3" descr="">
+            <a:extLst>
+              <a:ext uri="{C183D7F6-B498-43B3-948B-1728B52AA6E4}">
+                <adec:decorative xmlns:adec="http://schemas.microsoft.com/office/drawing/2017/decorative" val="1"/>
+              </a:ext>
+            </a:extLst>
+          </p:cNvPr>
           <p:cNvPicPr>
             <a:picLocks noChangeAspect="1"/>
           </p:cNvPicPr>
@@ -15042,7 +15683,13 @@
       </p:sp>
       <p:sp>
         <p:nvSpPr>
-          <p:cNvPr id="25" name="Root"/>
+          <p:cNvPr id="25" name="Root" descr="">
+            <a:extLst>
+              <a:ext uri="{C183D7F6-B498-43B3-948B-1728B52AA6E4}">
+                <adec:decorative xmlns:adec="http://schemas.microsoft.com/office/drawing/2017/decorative" val="1"/>
+              </a:ext>
+            </a:extLst>
+          </p:cNvPr>
           <p:cNvSpPr/>
           <p:nvPr/>
         </p:nvSpPr>
@@ -15076,7 +15723,13 @@
       </p:sp>
       <p:sp>
         <p:nvSpPr>
-          <p:cNvPr id="26" name="Icon FaSitemap"/>
+          <p:cNvPr id="26" name="Icon FaSitemap" descr="">
+            <a:extLst>
+              <a:ext uri="{C183D7F6-B498-43B3-948B-1728B52AA6E4}">
+                <adec:decorative xmlns:adec="http://schemas.microsoft.com/office/drawing/2017/decorative" val="1"/>
+              </a:ext>
+            </a:extLst>
+          </p:cNvPr>
           <p:cNvSpPr/>
           <p:nvPr/>
         </p:nvSpPr>
@@ -15101,7 +15754,13 @@
       </p:sp>
       <p:pic>
         <p:nvPicPr>
-          <p:cNvPr id="27" name="Image 4" descr="C:\Users\whale\git\mwb-b07\presentations\_build\icons\FaSitemap.png">    </p:cNvPr>
+          <p:cNvPr id="27" name="Image 4" descr="">
+            <a:extLst>
+              <a:ext uri="{C183D7F6-B498-43B3-948B-1728B52AA6E4}">
+                <adec:decorative xmlns:adec="http://schemas.microsoft.com/office/drawing/2017/decorative" val="1"/>
+              </a:ext>
+            </a:extLst>
+          </p:cNvPr>
           <p:cNvPicPr>
             <a:picLocks noChangeAspect="1"/>
           </p:cNvPicPr>
@@ -15366,7 +16025,13 @@
       </p:sp>
       <p:sp>
         <p:nvSpPr>
-          <p:cNvPr id="3" name="Tag What"/>
+          <p:cNvPr id="3" name="Tag What" descr="">
+            <a:extLst>
+              <a:ext uri="{C183D7F6-B498-43B3-948B-1728B52AA6E4}">
+                <adec:decorative xmlns:adec="http://schemas.microsoft.com/office/drawing/2017/decorative" val="1"/>
+              </a:ext>
+            </a:extLst>
+          </p:cNvPr>
           <p:cNvSpPr/>
           <p:nvPr/>
         </p:nvSpPr>
@@ -15448,7 +16113,7 @@
         <a:graphic>
           <a:graphicData uri="http://schemas.openxmlformats.org/drawingml/2006/table">
             <a:tbl>
-              <a:tblPr/>
+              <a:tblPr firstRow="1" bandRow="1"/>
               <a:tblGrid>
                 <a:gridCol w="2103120"/>
                 <a:gridCol w="4572000"/>
@@ -16149,7 +16814,13 @@
       </p:graphicFrame>
       <p:sp>
         <p:nvSpPr>
-          <p:cNvPr id="6" name="Vendor box"/>
+          <p:cNvPr id="6" name="Vendor box" descr="">
+            <a:extLst>
+              <a:ext uri="{C183D7F6-B498-43B3-948B-1728B52AA6E4}">
+                <adec:decorative xmlns:adec="http://schemas.microsoft.com/office/drawing/2017/decorative" val="1"/>
+              </a:ext>
+            </a:extLst>
+          </p:cNvPr>
           <p:cNvSpPr/>
           <p:nvPr/>
         </p:nvSpPr>
@@ -16183,7 +16854,13 @@
       </p:sp>
       <p:sp>
         <p:nvSpPr>
-          <p:cNvPr id="7" name="Icon FaArrowsRotate"/>
+          <p:cNvPr id="7" name="Icon FaArrowsRotate" descr="">
+            <a:extLst>
+              <a:ext uri="{C183D7F6-B498-43B3-948B-1728B52AA6E4}">
+                <adec:decorative xmlns:adec="http://schemas.microsoft.com/office/drawing/2017/decorative" val="1"/>
+              </a:ext>
+            </a:extLst>
+          </p:cNvPr>
           <p:cNvSpPr/>
           <p:nvPr/>
         </p:nvSpPr>
@@ -16208,7 +16885,13 @@
       </p:sp>
       <p:pic>
         <p:nvPicPr>
-          <p:cNvPr id="8" name="Image 0" descr="C:\Users\whale\git\mwb-b07\presentations\_build\icons\FaArrowsRotate.png">    </p:cNvPr>
+          <p:cNvPr id="8" name="Image 0" descr="">
+            <a:extLst>
+              <a:ext uri="{C183D7F6-B498-43B3-948B-1728B52AA6E4}">
+                <adec:decorative xmlns:adec="http://schemas.microsoft.com/office/drawing/2017/decorative" val="1"/>
+              </a:ext>
+            </a:extLst>
+          </p:cNvPr>
           <p:cNvPicPr>
             <a:picLocks noChangeAspect="1"/>
           </p:cNvPicPr>
@@ -16365,7 +17048,13 @@
       </p:sp>
       <p:sp>
         <p:nvSpPr>
-          <p:cNvPr id="11" name="Consolidate"/>
+          <p:cNvPr id="11" name="Consolidate" descr="">
+            <a:extLst>
+              <a:ext uri="{C183D7F6-B498-43B3-948B-1728B52AA6E4}">
+                <adec:decorative xmlns:adec="http://schemas.microsoft.com/office/drawing/2017/decorative" val="1"/>
+              </a:ext>
+            </a:extLst>
+          </p:cNvPr>
           <p:cNvSpPr/>
           <p:nvPr/>
         </p:nvSpPr>
@@ -16399,7 +17088,13 @@
       </p:sp>
       <p:sp>
         <p:nvSpPr>
-          <p:cNvPr id="12" name="Icon FaUserShield"/>
+          <p:cNvPr id="12" name="Icon FaUserShield" descr="">
+            <a:extLst>
+              <a:ext uri="{C183D7F6-B498-43B3-948B-1728B52AA6E4}">
+                <adec:decorative xmlns:adec="http://schemas.microsoft.com/office/drawing/2017/decorative" val="1"/>
+              </a:ext>
+            </a:extLst>
+          </p:cNvPr>
           <p:cNvSpPr/>
           <p:nvPr/>
         </p:nvSpPr>
@@ -16424,7 +17119,13 @@
       </p:sp>
       <p:pic>
         <p:nvPicPr>
-          <p:cNvPr id="13" name="Image 1" descr="C:\Users\whale\git\mwb-b07\presentations\_build\icons\FaUserShield.png">    </p:cNvPr>
+          <p:cNvPr id="13" name="Image 1" descr="">
+            <a:extLst>
+              <a:ext uri="{C183D7F6-B498-43B3-948B-1728B52AA6E4}">
+                <adec:decorative xmlns:adec="http://schemas.microsoft.com/office/drawing/2017/decorative" val="1"/>
+              </a:ext>
+            </a:extLst>
+          </p:cNvPr>
           <p:cNvPicPr>
             <a:picLocks noChangeAspect="1"/>
           </p:cNvPicPr>
@@ -16642,7 +17343,13 @@
       </p:sp>
       <p:sp>
         <p:nvSpPr>
-          <p:cNvPr id="3" name="Tag Who"/>
+          <p:cNvPr id="3" name="Tag Who" descr="">
+            <a:extLst>
+              <a:ext uri="{C183D7F6-B498-43B3-948B-1728B52AA6E4}">
+                <adec:decorative xmlns:adec="http://schemas.microsoft.com/office/drawing/2017/decorative" val="1"/>
+              </a:ext>
+            </a:extLst>
+          </p:cNvPr>
           <p:cNvSpPr/>
           <p:nvPr/>
         </p:nvSpPr>
@@ -16705,7 +17412,13 @@
       </p:sp>
       <p:sp>
         <p:nvSpPr>
-          <p:cNvPr id="5" name="Who col 1"/>
+          <p:cNvPr id="5" name="Who col 1" descr="">
+            <a:extLst>
+              <a:ext uri="{C183D7F6-B498-43B3-948B-1728B52AA6E4}">
+                <adec:decorative xmlns:adec="http://schemas.microsoft.com/office/drawing/2017/decorative" val="1"/>
+              </a:ext>
+            </a:extLst>
+          </p:cNvPr>
           <p:cNvSpPr/>
           <p:nvPr/>
         </p:nvSpPr>
@@ -16739,7 +17452,13 @@
       </p:sp>
       <p:sp>
         <p:nvSpPr>
-          <p:cNvPr id="6" name="Icon FaBuildingColumns"/>
+          <p:cNvPr id="6" name="Icon FaBuildingColumns" descr="">
+            <a:extLst>
+              <a:ext uri="{C183D7F6-B498-43B3-948B-1728B52AA6E4}">
+                <adec:decorative xmlns:adec="http://schemas.microsoft.com/office/drawing/2017/decorative" val="1"/>
+              </a:ext>
+            </a:extLst>
+          </p:cNvPr>
           <p:cNvSpPr/>
           <p:nvPr/>
         </p:nvSpPr>
@@ -16764,7 +17483,13 @@
       </p:sp>
       <p:pic>
         <p:nvPicPr>
-          <p:cNvPr id="7" name="Image 0" descr="C:\Users\whale\git\mwb-b07\presentations\_build\icons\FaBuildingColumns.png">    </p:cNvPr>
+          <p:cNvPr id="7" name="Image 0" descr="">
+            <a:extLst>
+              <a:ext uri="{C183D7F6-B498-43B3-948B-1728B52AA6E4}">
+                <adec:decorative xmlns:adec="http://schemas.microsoft.com/office/drawing/2017/decorative" val="1"/>
+              </a:ext>
+            </a:extLst>
+          </p:cNvPr>
           <p:cNvPicPr>
             <a:picLocks noChangeAspect="1"/>
           </p:cNvPicPr>
@@ -16951,7 +17676,13 @@
       </p:sp>
       <p:sp>
         <p:nvSpPr>
-          <p:cNvPr id="10" name="Who col 2"/>
+          <p:cNvPr id="10" name="Who col 2" descr="">
+            <a:extLst>
+              <a:ext uri="{C183D7F6-B498-43B3-948B-1728B52AA6E4}">
+                <adec:decorative xmlns:adec="http://schemas.microsoft.com/office/drawing/2017/decorative" val="1"/>
+              </a:ext>
+            </a:extLst>
+          </p:cNvPr>
           <p:cNvSpPr/>
           <p:nvPr/>
         </p:nvSpPr>
@@ -16985,7 +17716,13 @@
       </p:sp>
       <p:sp>
         <p:nvSpPr>
-          <p:cNvPr id="11" name="Icon FaUsersGear"/>
+          <p:cNvPr id="11" name="Icon FaUsersGear" descr="">
+            <a:extLst>
+              <a:ext uri="{C183D7F6-B498-43B3-948B-1728B52AA6E4}">
+                <adec:decorative xmlns:adec="http://schemas.microsoft.com/office/drawing/2017/decorative" val="1"/>
+              </a:ext>
+            </a:extLst>
+          </p:cNvPr>
           <p:cNvSpPr/>
           <p:nvPr/>
         </p:nvSpPr>
@@ -17010,7 +17747,13 @@
       </p:sp>
       <p:pic>
         <p:nvPicPr>
-          <p:cNvPr id="12" name="Image 1" descr="C:\Users\whale\git\mwb-b07\presentations\_build\icons\FaUsersGear.png">    </p:cNvPr>
+          <p:cNvPr id="12" name="Image 1" descr="">
+            <a:extLst>
+              <a:ext uri="{C183D7F6-B498-43B3-948B-1728B52AA6E4}">
+                <adec:decorative xmlns:adec="http://schemas.microsoft.com/office/drawing/2017/decorative" val="1"/>
+              </a:ext>
+            </a:extLst>
+          </p:cNvPr>
           <p:cNvPicPr>
             <a:picLocks noChangeAspect="1"/>
           </p:cNvPicPr>
@@ -17197,7 +17940,13 @@
       </p:sp>
       <p:sp>
         <p:nvSpPr>
-          <p:cNvPr id="15" name="Who col 3"/>
+          <p:cNvPr id="15" name="Who col 3" descr="">
+            <a:extLst>
+              <a:ext uri="{C183D7F6-B498-43B3-948B-1728B52AA6E4}">
+                <adec:decorative xmlns:adec="http://schemas.microsoft.com/office/drawing/2017/decorative" val="1"/>
+              </a:ext>
+            </a:extLst>
+          </p:cNvPr>
           <p:cNvSpPr/>
           <p:nvPr/>
         </p:nvSpPr>
@@ -17231,7 +17980,13 @@
       </p:sp>
       <p:sp>
         <p:nvSpPr>
-          <p:cNvPr id="16" name="Icon FaPeopleArrows"/>
+          <p:cNvPr id="16" name="Icon FaPeopleArrows" descr="">
+            <a:extLst>
+              <a:ext uri="{C183D7F6-B498-43B3-948B-1728B52AA6E4}">
+                <adec:decorative xmlns:adec="http://schemas.microsoft.com/office/drawing/2017/decorative" val="1"/>
+              </a:ext>
+            </a:extLst>
+          </p:cNvPr>
           <p:cNvSpPr/>
           <p:nvPr/>
         </p:nvSpPr>
@@ -17256,7 +18011,13 @@
       </p:sp>
       <p:pic>
         <p:nvPicPr>
-          <p:cNvPr id="17" name="Image 2" descr="C:\Users\whale\git\mwb-b07\presentations\_build\icons\FaPeopleArrows.png">    </p:cNvPr>
+          <p:cNvPr id="17" name="Image 2" descr="">
+            <a:extLst>
+              <a:ext uri="{C183D7F6-B498-43B3-948B-1728B52AA6E4}">
+                <adec:decorative xmlns:adec="http://schemas.microsoft.com/office/drawing/2017/decorative" val="1"/>
+              </a:ext>
+            </a:extLst>
+          </p:cNvPr>
           <p:cNvPicPr>
             <a:picLocks noChangeAspect="1"/>
           </p:cNvPicPr>
@@ -17443,7 +18204,13 @@
       </p:sp>
       <p:sp>
         <p:nvSpPr>
-          <p:cNvPr id="20" name="Separate"/>
+          <p:cNvPr id="20" name="Separate" descr="">
+            <a:extLst>
+              <a:ext uri="{C183D7F6-B498-43B3-948B-1728B52AA6E4}">
+                <adec:decorative xmlns:adec="http://schemas.microsoft.com/office/drawing/2017/decorative" val="1"/>
+              </a:ext>
+            </a:extLst>
+          </p:cNvPr>
           <p:cNvSpPr/>
           <p:nvPr/>
         </p:nvSpPr>
@@ -17477,7 +18244,13 @@
       </p:sp>
       <p:sp>
         <p:nvSpPr>
-          <p:cNvPr id="21" name="Icon FaScaleBalanced"/>
+          <p:cNvPr id="21" name="Icon FaScaleBalanced" descr="">
+            <a:extLst>
+              <a:ext uri="{C183D7F6-B498-43B3-948B-1728B52AA6E4}">
+                <adec:decorative xmlns:adec="http://schemas.microsoft.com/office/drawing/2017/decorative" val="1"/>
+              </a:ext>
+            </a:extLst>
+          </p:cNvPr>
           <p:cNvSpPr/>
           <p:nvPr/>
         </p:nvSpPr>
@@ -17502,7 +18275,13 @@
       </p:sp>
       <p:pic>
         <p:nvPicPr>
-          <p:cNvPr id="22" name="Image 3" descr="C:\Users\whale\git\mwb-b07\presentations\_build\icons\FaScaleBalanced.png">    </p:cNvPr>
+          <p:cNvPr id="22" name="Image 3" descr="">
+            <a:extLst>
+              <a:ext uri="{C183D7F6-B498-43B3-948B-1728B52AA6E4}">
+                <adec:decorative xmlns:adec="http://schemas.microsoft.com/office/drawing/2017/decorative" val="1"/>
+              </a:ext>
+            </a:extLst>
+          </p:cNvPr>
           <p:cNvPicPr>
             <a:picLocks noChangeAspect="1"/>
           </p:cNvPicPr>
@@ -17720,7 +18499,13 @@
       </p:sp>
       <p:sp>
         <p:nvSpPr>
-          <p:cNvPr id="3" name="Tag How"/>
+          <p:cNvPr id="3" name="Tag How" descr="">
+            <a:extLst>
+              <a:ext uri="{C183D7F6-B498-43B3-948B-1728B52AA6E4}">
+                <adec:decorative xmlns:adec="http://schemas.microsoft.com/office/drawing/2017/decorative" val="1"/>
+              </a:ext>
+            </a:extLst>
+          </p:cNvPr>
           <p:cNvSpPr/>
           <p:nvPr/>
         </p:nvSpPr>
@@ -17783,7 +18568,13 @@
       </p:sp>
       <p:sp>
         <p:nvSpPr>
-          <p:cNvPr id="5" name="Icon FaCloud"/>
+          <p:cNvPr id="5" name="Icon FaCloud" descr="">
+            <a:extLst>
+              <a:ext uri="{C183D7F6-B498-43B3-948B-1728B52AA6E4}">
+                <adec:decorative xmlns:adec="http://schemas.microsoft.com/office/drawing/2017/decorative" val="1"/>
+              </a:ext>
+            </a:extLst>
+          </p:cNvPr>
           <p:cNvSpPr/>
           <p:nvPr/>
         </p:nvSpPr>
@@ -17808,7 +18599,13 @@
       </p:sp>
       <p:pic>
         <p:nvPicPr>
-          <p:cNvPr id="6" name="Image 0" descr="C:\Users\whale\git\mwb-b07\presentations\_build\icons\FaCloud.png">    </p:cNvPr>
+          <p:cNvPr id="6" name="Image 0" descr="">
+            <a:extLst>
+              <a:ext uri="{C183D7F6-B498-43B3-948B-1728B52AA6E4}">
+                <adec:decorative xmlns:adec="http://schemas.microsoft.com/office/drawing/2017/decorative" val="1"/>
+              </a:ext>
+            </a:extLst>
+          </p:cNvPr>
           <p:cNvPicPr>
             <a:picLocks noChangeAspect="1"/>
           </p:cNvPicPr>
@@ -17882,7 +18679,13 @@
       </p:sp>
       <p:sp>
         <p:nvSpPr>
-          <p:cNvPr id="8" name="Icon FaServer"/>
+          <p:cNvPr id="8" name="Icon FaServer" descr="">
+            <a:extLst>
+              <a:ext uri="{C183D7F6-B498-43B3-948B-1728B52AA6E4}">
+                <adec:decorative xmlns:adec="http://schemas.microsoft.com/office/drawing/2017/decorative" val="1"/>
+              </a:ext>
+            </a:extLst>
+          </p:cNvPr>
           <p:cNvSpPr/>
           <p:nvPr/>
         </p:nvSpPr>
@@ -17907,7 +18710,13 @@
       </p:sp>
       <p:pic>
         <p:nvPicPr>
-          <p:cNvPr id="9" name="Image 1" descr="C:\Users\whale\git\mwb-b07\presentations\_build\icons\FaServer.png">    </p:cNvPr>
+          <p:cNvPr id="9" name="Image 1" descr="">
+            <a:extLst>
+              <a:ext uri="{C183D7F6-B498-43B3-948B-1728B52AA6E4}">
+                <adec:decorative xmlns:adec="http://schemas.microsoft.com/office/drawing/2017/decorative" val="1"/>
+              </a:ext>
+            </a:extLst>
+          </p:cNvPr>
           <p:cNvPicPr>
             <a:picLocks noChangeAspect="1"/>
           </p:cNvPicPr>
@@ -17981,7 +18790,13 @@
       </p:sp>
       <p:sp>
         <p:nvSpPr>
-          <p:cNvPr id="11" name="Icon FaKey"/>
+          <p:cNvPr id="11" name="Icon FaKey" descr="">
+            <a:extLst>
+              <a:ext uri="{C183D7F6-B498-43B3-948B-1728B52AA6E4}">
+                <adec:decorative xmlns:adec="http://schemas.microsoft.com/office/drawing/2017/decorative" val="1"/>
+              </a:ext>
+            </a:extLst>
+          </p:cNvPr>
           <p:cNvSpPr/>
           <p:nvPr/>
         </p:nvSpPr>
@@ -18006,7 +18821,13 @@
       </p:sp>
       <p:pic>
         <p:nvPicPr>
-          <p:cNvPr id="12" name="Image 2" descr="C:\Users\whale\git\mwb-b07\presentations\_build\icons\FaKey.png">    </p:cNvPr>
+          <p:cNvPr id="12" name="Image 2" descr="">
+            <a:extLst>
+              <a:ext uri="{C183D7F6-B498-43B3-948B-1728B52AA6E4}">
+                <adec:decorative xmlns:adec="http://schemas.microsoft.com/office/drawing/2017/decorative" val="1"/>
+              </a:ext>
+            </a:extLst>
+          </p:cNvPr>
           <p:cNvPicPr>
             <a:picLocks noChangeAspect="1"/>
           </p:cNvPicPr>
@@ -18099,7 +18920,7 @@
         <a:graphic>
           <a:graphicData uri="http://schemas.openxmlformats.org/drawingml/2006/table">
             <a:tbl>
-              <a:tblPr/>
+              <a:tblPr firstRow="1" bandRow="1"/>
               <a:tblGrid>
                 <a:gridCol w="2011680"/>
                 <a:gridCol w="3063240"/>
@@ -18800,7 +19621,13 @@
       </p:graphicFrame>
       <p:sp>
         <p:nvSpPr>
-          <p:cNvPr id="15" name="Profiles"/>
+          <p:cNvPr id="15" name="Profiles" descr="">
+            <a:extLst>
+              <a:ext uri="{C183D7F6-B498-43B3-948B-1728B52AA6E4}">
+                <adec:decorative xmlns:adec="http://schemas.microsoft.com/office/drawing/2017/decorative" val="1"/>
+              </a:ext>
+            </a:extLst>
+          </p:cNvPr>
           <p:cNvSpPr/>
           <p:nvPr/>
         </p:nvSpPr>
@@ -18834,7 +19661,13 @@
       </p:sp>
       <p:sp>
         <p:nvSpPr>
-          <p:cNvPr id="16" name="Icon FaClipboardCheck"/>
+          <p:cNvPr id="16" name="Icon FaClipboardCheck" descr="">
+            <a:extLst>
+              <a:ext uri="{C183D7F6-B498-43B3-948B-1728B52AA6E4}">
+                <adec:decorative xmlns:adec="http://schemas.microsoft.com/office/drawing/2017/decorative" val="1"/>
+              </a:ext>
+            </a:extLst>
+          </p:cNvPr>
           <p:cNvSpPr/>
           <p:nvPr/>
         </p:nvSpPr>
@@ -18859,7 +19692,13 @@
       </p:sp>
       <p:pic>
         <p:nvPicPr>
-          <p:cNvPr id="17" name="Image 3" descr="C:\Users\whale\git\mwb-b07\presentations\_build\icons\FaClipboardCheck.png">    </p:cNvPr>
+          <p:cNvPr id="17" name="Image 3" descr="">
+            <a:extLst>
+              <a:ext uri="{C183D7F6-B498-43B3-948B-1728B52AA6E4}">
+                <adec:decorative xmlns:adec="http://schemas.microsoft.com/office/drawing/2017/decorative" val="1"/>
+              </a:ext>
+            </a:extLst>
+          </p:cNvPr>
           <p:cNvPicPr>
             <a:picLocks noChangeAspect="1"/>
           </p:cNvPicPr>
@@ -19018,9 +19857,9 @@
 </file>
 
 <file path=ppt/theme/theme1.xml><?xml version="1.0" encoding="utf-8"?>
-<a:theme xmlns:a="http://schemas.openxmlformats.org/drawingml/2006/main" name="Modernization Workbook">
+<a:theme xmlns:a="http://schemas.openxmlformats.org/drawingml/2006/main" name="Federal Modernization Workbook">
   <a:themeElements>
-    <a:clrScheme name="Modernization Workbook">
+    <a:clrScheme name="Federal Modernization Workbook">
       <a:dk1>
         <a:srgbClr val="1F2A44"/>
       </a:dk1>
@@ -19058,7 +19897,7 @@
         <a:srgbClr val="334155"/>
       </a:folHlink>
     </a:clrScheme>
-    <a:fontScheme name="Modernization Workbook">
+    <a:fontScheme name="Federal Modernization Workbook">
       <a:majorFont>
         <a:latin typeface="Cambria"/>
         <a:ea typeface=""/>
